--- a/resources/year8/L10_Sequences_in_Real_Life.pptx
+++ b/resources/year8/L10_Sequences_in_Real_Life.pptx
@@ -6350,8 +6350,8 @@
         </p:nvSpPr>
         <p:spPr>
           <a:xfrm>
-            <a:off x="457200" y="777240"/>
-            <a:ext cx="11277295" cy="640080"/>
+            <a:off x="457200" y="685800"/>
+            <a:ext cx="11277295" cy="457200"/>
           </a:xfrm>
           <a:prstGeom prst="rect">
             <a:avLst/>
@@ -6373,7 +6373,7 @@
               </a:spcAft>
             </a:pPr>
             <a:r>
-              <a:rPr sz="3400" b="1" i="0">
+              <a:rPr sz="2800" b="1" i="0">
                 <a:solidFill>
                   <a:srgbClr val="000000"/>
                 </a:solidFill>
@@ -6392,8 +6392,8 @@
         </p:nvSpPr>
         <p:spPr>
           <a:xfrm>
-            <a:off x="457200" y="1645920"/>
-            <a:ext cx="11277295" cy="2926080"/>
+            <a:off x="457200" y="1170432"/>
+            <a:ext cx="11277295" cy="502920"/>
           </a:xfrm>
           <a:prstGeom prst="rect">
             <a:avLst/>
@@ -6411,69 +6411,295 @@
                 <a:spcPts val="0"/>
               </a:spcBef>
               <a:spcAft>
-                <a:spcPts val="1200"/>
+                <a:spcPts val="0"/>
               </a:spcAft>
             </a:pPr>
             <a:r>
-              <a:rPr sz="2200" b="0" i="0">
+              <a:rPr sz="1300" b="0" i="1">
+                <a:solidFill>
+                  <a:srgbClr val="595959"/>
+                </a:solidFill>
+                <a:latin typeface="Arial"/>
+              </a:rPr>
+              <a:t>In pairs, invent a growing pattern and swap with another pair to find their nth term. Stuck? Use a starter pattern below.</a:t>
+            </a:r>
+          </a:p>
+        </p:txBody>
+      </p:sp>
+      <p:sp>
+        <p:nvSpPr>
+          <p:cNvPr id="6" name="TextBox 5"/>
+          <p:cNvSpPr txBox="1"/>
+          <p:nvPr/>
+        </p:nvSpPr>
+        <p:spPr>
+          <a:xfrm>
+            <a:off x="457200" y="1874519"/>
+            <a:ext cx="5455767" cy="1295400"/>
+          </a:xfrm>
+          <a:prstGeom prst="rect">
+            <a:avLst/>
+          </a:prstGeom>
+          <a:noFill/>
+        </p:spPr>
+        <p:txBody>
+          <a:bodyPr wrap="square" anchor="ctr" lIns="0" rIns="0" tIns="0" bIns="0">
+            <a:spAutoFit/>
+          </a:bodyPr>
+          <a:lstStyle/>
+          <a:p>
+            <a:pPr algn="l"/>
+            <a:r>
+              <a:rPr sz="1500" b="1" i="0">
                 <a:solidFill>
                   <a:srgbClr val="000000"/>
                 </a:solidFill>
                 <a:latin typeface="Arial"/>
               </a:rPr>
-              <a:t>-  In pairs, invent a simple real-life growing pattern (chairs, tiles, cost, anything!).</a:t>
-            </a:r>
-          </a:p>
-          <a:p>
-            <a:pPr algn="l">
-              <a:spcBef>
-                <a:spcPts val="0"/>
-              </a:spcBef>
-              <a:spcAft>
-                <a:spcPts val="1200"/>
-              </a:spcAft>
-            </a:pPr>
-            <a:r>
-              <a:rPr sz="2200" b="0" i="0">
+              <a:t>1. Chairs need tables: 4, 6, 8 for 1, 2, 3 chairs   </a:t>
+            </a:r>
+            <a:r>
+              <a:rPr sz="1500" b="1" i="0">
+                <a:solidFill>
+                  <a:srgbClr val="2B6B3D"/>
+                </a:solidFill>
+                <a:latin typeface="Arial"/>
+              </a:rPr>
+              <a:t>nth term = 2n + 2</a:t>
+            </a:r>
+          </a:p>
+        </p:txBody>
+      </p:sp>
+      <p:sp>
+        <p:nvSpPr>
+          <p:cNvPr id="7" name="TextBox 6"/>
+          <p:cNvSpPr txBox="1"/>
+          <p:nvPr/>
+        </p:nvSpPr>
+        <p:spPr>
+          <a:xfrm>
+            <a:off x="457200" y="3169919"/>
+            <a:ext cx="5455767" cy="1295400"/>
+          </a:xfrm>
+          <a:prstGeom prst="rect">
+            <a:avLst/>
+          </a:prstGeom>
+          <a:noFill/>
+        </p:spPr>
+        <p:txBody>
+          <a:bodyPr wrap="square" anchor="ctr" lIns="0" rIns="0" tIns="0" bIns="0">
+            <a:spAutoFit/>
+          </a:bodyPr>
+          <a:lstStyle/>
+          <a:p>
+            <a:pPr algn="l"/>
+            <a:r>
+              <a:rPr sz="1500" b="1" i="0">
                 <a:solidFill>
                   <a:srgbClr val="000000"/>
                 </a:solidFill>
                 <a:latin typeface="Arial"/>
               </a:rPr>
-              <a:t>-  Swap your pattern with another pair and find their nth term in 3 minutes.</a:t>
-            </a:r>
-          </a:p>
-          <a:p>
-            <a:pPr algn="l">
-              <a:spcBef>
-                <a:spcPts val="0"/>
-              </a:spcBef>
-              <a:spcAft>
-                <a:spcPts val="1200"/>
-              </a:spcAft>
-            </a:pPr>
-            <a:r>
-              <a:rPr sz="2200" b="0" i="0">
+              <a:t>2. Tiling costs £5/tile plus £10 fitting fee   </a:t>
+            </a:r>
+            <a:r>
+              <a:rPr sz="1500" b="1" i="0">
+                <a:solidFill>
+                  <a:srgbClr val="2B6B3D"/>
+                </a:solidFill>
+                <a:latin typeface="Arial"/>
+              </a:rPr>
+              <a:t>nth term = 5n + 10</a:t>
+            </a:r>
+          </a:p>
+        </p:txBody>
+      </p:sp>
+      <p:sp>
+        <p:nvSpPr>
+          <p:cNvPr id="8" name="TextBox 7"/>
+          <p:cNvSpPr txBox="1"/>
+          <p:nvPr/>
+        </p:nvSpPr>
+        <p:spPr>
+          <a:xfrm>
+            <a:off x="457200" y="4465319"/>
+            <a:ext cx="5455767" cy="1295400"/>
+          </a:xfrm>
+          <a:prstGeom prst="rect">
+            <a:avLst/>
+          </a:prstGeom>
+          <a:noFill/>
+        </p:spPr>
+        <p:txBody>
+          <a:bodyPr wrap="square" anchor="ctr" lIns="0" rIns="0" tIns="0" bIns="0">
+            <a:spAutoFit/>
+          </a:bodyPr>
+          <a:lstStyle/>
+          <a:p>
+            <a:pPr algn="l"/>
+            <a:r>
+              <a:rPr sz="1500" b="1" i="0">
                 <a:solidFill>
                   <a:srgbClr val="000000"/>
                 </a:solidFill>
                 <a:latin typeface="Arial"/>
               </a:rPr>
-              <a:t>-  Share 2-3 favourite patterns with the whole class — can everyone else crack the rule?</a:t>
-            </a:r>
-          </a:p>
-        </p:txBody>
-      </p:sp>
-      <p:sp>
-        <p:nvSpPr>
-          <p:cNvPr id="6" name="Rounded Rectangle 5"/>
+              <a:t>3. Cup tower heights: 3, 5, 7, 9 cups   </a:t>
+            </a:r>
+            <a:r>
+              <a:rPr sz="1500" b="1" i="0">
+                <a:solidFill>
+                  <a:srgbClr val="2B6B3D"/>
+                </a:solidFill>
+                <a:latin typeface="Arial"/>
+              </a:rPr>
+              <a:t>nth term = 2n + 1</a:t>
+            </a:r>
+          </a:p>
+        </p:txBody>
+      </p:sp>
+      <p:sp>
+        <p:nvSpPr>
+          <p:cNvPr id="9" name="TextBox 8"/>
+          <p:cNvSpPr txBox="1"/>
+          <p:nvPr/>
+        </p:nvSpPr>
+        <p:spPr>
+          <a:xfrm>
+            <a:off x="6278727" y="1874519"/>
+            <a:ext cx="5455767" cy="1295400"/>
+          </a:xfrm>
+          <a:prstGeom prst="rect">
+            <a:avLst/>
+          </a:prstGeom>
+          <a:noFill/>
+        </p:spPr>
+        <p:txBody>
+          <a:bodyPr wrap="square" anchor="ctr" lIns="0" rIns="0" tIns="0" bIns="0">
+            <a:spAutoFit/>
+          </a:bodyPr>
+          <a:lstStyle/>
+          <a:p>
+            <a:pPr algn="l"/>
+            <a:r>
+              <a:rPr sz="1500" b="1" i="0">
+                <a:solidFill>
+                  <a:srgbClr val="000000"/>
+                </a:solidFill>
+                <a:latin typeface="Arial"/>
+              </a:rPr>
+              <a:t>4. Garden path slabs: 4, 7, 10, 13   </a:t>
+            </a:r>
+            <a:r>
+              <a:rPr sz="1500" b="1" i="0">
+                <a:solidFill>
+                  <a:srgbClr val="2B6B3D"/>
+                </a:solidFill>
+                <a:latin typeface="Arial"/>
+              </a:rPr>
+              <a:t>nth term = 3n + 1</a:t>
+            </a:r>
+          </a:p>
+        </p:txBody>
+      </p:sp>
+      <p:sp>
+        <p:nvSpPr>
+          <p:cNvPr id="10" name="TextBox 9"/>
+          <p:cNvSpPr txBox="1"/>
+          <p:nvPr/>
+        </p:nvSpPr>
+        <p:spPr>
+          <a:xfrm>
+            <a:off x="6278727" y="3169919"/>
+            <a:ext cx="5455767" cy="1295400"/>
+          </a:xfrm>
+          <a:prstGeom prst="rect">
+            <a:avLst/>
+          </a:prstGeom>
+          <a:noFill/>
+        </p:spPr>
+        <p:txBody>
+          <a:bodyPr wrap="square" anchor="ctr" lIns="0" rIns="0" tIns="0" bIns="0">
+            <a:spAutoFit/>
+          </a:bodyPr>
+          <a:lstStyle/>
+          <a:p>
+            <a:pPr algn="l"/>
+            <a:r>
+              <a:rPr sz="1500" b="1" i="0">
+                <a:solidFill>
+                  <a:srgbClr val="000000"/>
+                </a:solidFill>
+                <a:latin typeface="Arial"/>
+              </a:rPr>
+              <a:t>5. Theatre row seats: 12, 17, 22, 27   </a:t>
+            </a:r>
+            <a:r>
+              <a:rPr sz="1500" b="1" i="0">
+                <a:solidFill>
+                  <a:srgbClr val="2B6B3D"/>
+                </a:solidFill>
+                <a:latin typeface="Arial"/>
+              </a:rPr>
+              <a:t>nth term = 5n + 7</a:t>
+            </a:r>
+          </a:p>
+        </p:txBody>
+      </p:sp>
+      <p:sp>
+        <p:nvSpPr>
+          <p:cNvPr id="11" name="TextBox 10"/>
+          <p:cNvSpPr txBox="1"/>
+          <p:nvPr/>
+        </p:nvSpPr>
+        <p:spPr>
+          <a:xfrm>
+            <a:off x="6278727" y="4465319"/>
+            <a:ext cx="5455767" cy="1295400"/>
+          </a:xfrm>
+          <a:prstGeom prst="rect">
+            <a:avLst/>
+          </a:prstGeom>
+          <a:noFill/>
+        </p:spPr>
+        <p:txBody>
+          <a:bodyPr wrap="square" anchor="ctr" lIns="0" rIns="0" tIns="0" bIns="0">
+            <a:spAutoFit/>
+          </a:bodyPr>
+          <a:lstStyle/>
+          <a:p>
+            <a:pPr algn="l"/>
+            <a:r>
+              <a:rPr sz="1500" b="1" i="0">
+                <a:solidFill>
+                  <a:srgbClr val="000000"/>
+                </a:solidFill>
+                <a:latin typeface="Arial"/>
+              </a:rPr>
+              <a:t>6. Savings: £3, £7, £11, £15 per week   </a:t>
+            </a:r>
+            <a:r>
+              <a:rPr sz="1500" b="1" i="0">
+                <a:solidFill>
+                  <a:srgbClr val="2B6B3D"/>
+                </a:solidFill>
+                <a:latin typeface="Arial"/>
+              </a:rPr>
+              <a:t>nth term = 4n − 1</a:t>
+            </a:r>
+          </a:p>
+        </p:txBody>
+      </p:sp>
+      <p:sp>
+        <p:nvSpPr>
+          <p:cNvPr id="12" name="Rounded Rectangle 11"/>
           <p:cNvSpPr/>
           <p:nvPr/>
         </p:nvSpPr>
         <p:spPr>
           <a:xfrm>
-            <a:off x="457200" y="4937760"/>
-            <a:ext cx="11277295" cy="1097280"/>
+            <a:off x="457200" y="5897880"/>
+            <a:ext cx="11277295" cy="548640"/>
           </a:xfrm>
           <a:prstGeom prst="roundRect">
             <a:avLst/>
@@ -6508,7 +6734,7 @@
           <a:p>
             <a:pPr algn="ctr"/>
             <a:r>
-              <a:rPr sz="2200" b="1" i="0">
+              <a:rPr sz="1600" b="1" i="0">
                 <a:solidFill>
                   <a:srgbClr val="000000"/>
                 </a:solidFill>
@@ -6521,7 +6747,7 @@
       </p:sp>
       <p:sp>
         <p:nvSpPr>
-          <p:cNvPr id="7" name="TextBox 6"/>
+          <p:cNvPr id="13" name="TextBox 12"/>
           <p:cNvSpPr txBox="1"/>
           <p:nvPr/>
         </p:nvSpPr>
